--- a/entregables/2026-10-08-presentacion-comite/Academia_Digital_Capacitacion_por_Misiones_AMMX_One_Page.pptx
+++ b/entregables/2026-10-08-presentacion-comite/Academia_Digital_Capacitacion_por_Misiones_AMMX_One_Page.pptx
@@ -505,7 +505,7 @@
               <a:t>CÓMO EXPLICARLA: arriba, qué cambia y las cifras clave. Al centro, el ciclo de cada paso: los cuatro primeros en la plataforma, los dos últimos en piso. Abajo, las dos misiones, cómo se validaron, las reglas y la ruta con las cuatro propuestas.
 POR QUÉ IMPORTA LA VALIDACIÓN: Seguridad tiene veto y lo ejerció; nada se presenta como procedimiento aprobado ni como certificación.
 PUNTOS A CERRAR: (1) especialistas de Seguridad, Mantenimiento e Ingeniería de Proceso para el taller de datos de planta; (2) respaldo de las direcciones a las reglas de no uso ante la CMCAP; (3) fecha de la próxima sesión para los resultados.
-[POR CONFIRMAR] Fechas del piloto (12–16 oct) e informe (19 oct): tentativas. Alineación con ILUO: propuesta por validar con Seguridad y RH. Hallazgos: 33 = 19 de Alturas + 14 de LOTO y documentos, sin contar 7 de seguimiento ya cerrados.</a:t>
+[POR CONFIRMAR] Fechas del piloto (12–16 oct) e informe (19 oct): tentativas. Alineación con ILUO: propuesta por validar con Seguridad y RH. Hallazgos: 33 = 19 de Alturas + 14 de LOTO y documentos, sin contar 7 de seguimiento: 6 cerrados y 1 mejora menor de Alturas pendiente.</a:t>
             </a:r>
             <a:endParaRPr lang="en-US" dirty="0"/>
           </a:p>
@@ -1131,7 +1131,7 @@
                 <a:ea typeface="Calibri" pitchFamily="34" charset="-122"/>
                 <a:cs typeface="Calibri" pitchFamily="34" charset="-120"/>
               </a:rPr>
-              <a:t>La plataforma prepara (nivel I de ILUO); la competencia se demuestra en piso, con evaluador, y se registra en IMaS y DC-3/SIRCE.</a:t>
+              <a:t>La plataforma apoya el nivel I de ILUO sin acreditarlo ni asignar niveles (alineación por validar); la competencia se demuestra en piso, con evaluador, y se registra en IMaS y DC-3/SIRCE.</a:t>
             </a:r>
             <a:endParaRPr lang="en-US" sz="770" dirty="0"/>
           </a:p>
@@ -3203,7 +3203,7 @@
                 <a:ea typeface="Calibri" pitchFamily="34" charset="-122"/>
                 <a:cs typeface="Calibri" pitchFamily="34" charset="-120"/>
               </a:rPr>
-              <a:t>energías por controlar</a:t>
+              <a:t>energías del escenario</a:t>
             </a:r>
             <a:endParaRPr lang="en-US" sz="780" dirty="0"/>
           </a:p>
@@ -3242,7 +3242,7 @@
                 <a:ea typeface="Calibri" pitchFamily="34" charset="-122"/>
                 <a:cs typeface="Calibri" pitchFamily="34" charset="-120"/>
               </a:rPr>
-              <a:t>Eléctrica, gravedad y mecánica</a:t>
+              <a:t>Una banda real puede tener más</a:t>
             </a:r>
             <a:endParaRPr lang="en-US" sz="700" dirty="0"/>
           </a:p>
@@ -3582,7 +3582,7 @@
                 <a:ea typeface="Calibri" pitchFamily="34" charset="-122"/>
                 <a:cs typeface="Calibri" pitchFamily="34" charset="-120"/>
               </a:rPr>
-              <a:t>Seguridad, Operaciones y Laboral</a:t>
+              <a:t>Seguridad · Operaciones · Laboral (confianza)</a:t>
             </a:r>
             <a:endParaRPr lang="en-US" sz="780" dirty="0"/>
           </a:p>
@@ -4034,8 +4034,8 @@
         </p:nvSpPr>
         <p:spPr>
           <a:xfrm>
-            <a:off x="9178290" y="3986784"/>
-            <a:ext cx="2452878" cy="155448"/>
+            <a:off x="9178290" y="4005072"/>
+            <a:ext cx="2471166" cy="1307592"/>
           </a:xfrm>
           <a:prstGeom prst="rect">
             <a:avLst/>
@@ -4047,54 +4047,15 @@
           <a:bodyPr wrap="square" lIns="0" tIns="0" rIns="0" bIns="0" rtlCol="0" anchor="t"/>
           <a:lstStyle/>
           <a:p>
-            <a:pPr indent="0" marL="0">
-              <a:buNone/>
-            </a:pPr>
-            <a:r>
-              <a:rPr lang="en-US" sz="780" dirty="0">
-                <a:solidFill>
-                  <a:srgbClr val="78787F"/>
-                </a:solidFill>
-                <a:latin typeface="Calibri" pitchFamily="34" charset="0"/>
-                <a:ea typeface="Calibri" pitchFamily="34" charset="-122"/>
-                <a:cs typeface="Calibri" pitchFamily="34" charset="-120"/>
-              </a:rPr>
-              <a:t>Mismos textos en app, documentos y guion</a:t>
-            </a:r>
-            <a:endParaRPr lang="en-US" sz="780" dirty="0"/>
-          </a:p>
-        </p:txBody>
-      </p:sp>
-      <p:sp>
-        <p:nvSpPr>
-          <p:cNvPr id="95" name="Text 92"/>
-          <p:cNvSpPr txBox="1"/>
-          <p:nvPr/>
-        </p:nvSpPr>
-        <p:spPr>
-          <a:xfrm>
-            <a:off x="9178290" y="4187952"/>
-            <a:ext cx="2452878" cy="1005840"/>
-          </a:xfrm>
-          <a:prstGeom prst="rect">
-            <a:avLst/>
-          </a:prstGeom>
-          <a:noFill/>
-          <a:ln/>
-        </p:spPr>
-        <p:txBody>
-          <a:bodyPr wrap="square" lIns="0" tIns="0" rIns="0" bIns="0" rtlCol="0" anchor="t"/>
-          <a:lstStyle/>
-          <a:p>
-            <a:pPr marL="129794" indent="-129794">
+            <a:pPr marL="122682" indent="-122682">
               <a:spcAft>
-                <a:spcPts val="438"/>
+                <a:spcPts val="414"/>
               </a:spcAft>
               <a:buSzPct val="100000"/>
               <a:buChar char="•"/>
             </a:pPr>
             <a:r>
-              <a:rPr lang="en-US" sz="730" dirty="0">
+              <a:rPr lang="en-US" sz="690" dirty="0">
                 <a:solidFill>
                   <a:srgbClr val="33333A"/>
                 </a:solidFill>
@@ -4102,20 +4063,20 @@
                 <a:ea typeface="Calibri" pitchFamily="34" charset="-122"/>
                 <a:cs typeface="Calibri" pitchFamily="34" charset="-120"/>
               </a:rPr>
-              <a:t>No certifica, no habilita ni emite DC-3.</a:t>
-            </a:r>
-            <a:endParaRPr lang="en-US" sz="730" dirty="0"/>
-          </a:p>
-          <a:p>
-            <a:pPr marL="129794" indent="-129794">
+              <a:t>No certifica, no habilita, no emite DC-3 ni es examen de suficiencia o de escalafón.</a:t>
+            </a:r>
+            <a:endParaRPr lang="en-US" sz="690" dirty="0"/>
+          </a:p>
+          <a:p>
+            <a:pPr marL="122682" indent="-122682">
               <a:spcAft>
-                <a:spcPts val="438"/>
+                <a:spcPts val="414"/>
               </a:spcAft>
               <a:buSzPct val="100000"/>
               <a:buChar char="•"/>
             </a:pPr>
             <a:r>
-              <a:rPr lang="en-US" sz="730" dirty="0">
+              <a:rPr lang="en-US" sz="690" dirty="0">
                 <a:solidFill>
                   <a:srgbClr val="33333A"/>
                 </a:solidFill>
@@ -4123,20 +4084,20 @@
                 <a:ea typeface="Calibri" pitchFamily="34" charset="-122"/>
                 <a:cs typeface="Calibri" pitchFamily="34" charset="-120"/>
               </a:rPr>
-              <a:t>No se usa para escalafón, desempeño, sanciones ni bonos.</a:t>
-            </a:r>
-            <a:endParaRPr lang="en-US" sz="730" dirty="0"/>
-          </a:p>
-          <a:p>
-            <a:pPr marL="129794" indent="-129794">
+              <a:t>Ni la práctica ni el avance se usan para escalafón, ascensos, cambios de puesto o de categoría, evaluación de desempeño, sanciones ni bonos.</a:t>
+            </a:r>
+            <a:endParaRPr lang="en-US" sz="690" dirty="0"/>
+          </a:p>
+          <a:p>
+            <a:pPr marL="122682" indent="-122682">
               <a:spcAft>
-                <a:spcPts val="438"/>
+                <a:spcPts val="414"/>
               </a:spcAft>
               <a:buSzPct val="100000"/>
               <a:buChar char="•"/>
             </a:pPr>
             <a:r>
-              <a:rPr lang="en-US" sz="730" dirty="0">
+              <a:rPr lang="en-US" sz="690" dirty="0">
                 <a:solidFill>
                   <a:srgbClr val="33333A"/>
                 </a:solidFill>
@@ -4146,18 +4107,18 @@
               </a:rPr>
               <a:t>No inventa datos de planta: quedan pendientes de validación.</a:t>
             </a:r>
-            <a:endParaRPr lang="en-US" sz="730" dirty="0"/>
-          </a:p>
-          <a:p>
-            <a:pPr marL="129794" indent="-129794">
+            <a:endParaRPr lang="en-US" sz="690" dirty="0"/>
+          </a:p>
+          <a:p>
+            <a:pPr marL="122682" indent="-122682">
               <a:spcAft>
-                <a:spcPts val="438"/>
+                <a:spcPts val="414"/>
               </a:spcAft>
               <a:buSzPct val="100000"/>
               <a:buChar char="•"/>
             </a:pPr>
             <a:r>
-              <a:rPr lang="en-US" sz="730" dirty="0">
+              <a:rPr lang="en-US" sz="690" dirty="0">
                 <a:solidFill>
                   <a:srgbClr val="33333A"/>
                 </a:solidFill>
@@ -4165,54 +4126,15 @@
                 <a:ea typeface="Calibri" pitchFamily="34" charset="-122"/>
                 <a:cs typeface="Calibri" pitchFamily="34" charset="-120"/>
               </a:rPr>
-              <a:t>Sin nombres; los datos se borran con un botón.</a:t>
-            </a:r>
-            <a:endParaRPr lang="en-US" sz="730" dirty="0"/>
-          </a:p>
-        </p:txBody>
-      </p:sp>
-      <p:sp>
-        <p:nvSpPr>
-          <p:cNvPr id="96" name="Text 93"/>
-          <p:cNvSpPr txBox="1"/>
-          <p:nvPr/>
-        </p:nvSpPr>
-        <p:spPr>
-          <a:xfrm>
-            <a:off x="9178290" y="5138928"/>
-            <a:ext cx="2471166" cy="164592"/>
-          </a:xfrm>
-          <a:prstGeom prst="rect">
-            <a:avLst/>
-          </a:prstGeom>
-          <a:noFill/>
-          <a:ln/>
-        </p:spPr>
-        <p:txBody>
-          <a:bodyPr wrap="square" lIns="0" tIns="0" rIns="0" bIns="0" rtlCol="0" anchor="t"/>
-          <a:lstStyle/>
-          <a:p>
-            <a:pPr indent="0" marL="0">
-              <a:buNone/>
-            </a:pPr>
-            <a:r>
-              <a:rPr lang="en-US" sz="750" b="1" dirty="0">
-                <a:solidFill>
-                  <a:srgbClr val="7D2E90"/>
-                </a:solidFill>
-                <a:latin typeface="Calibri" pitchFamily="34" charset="0"/>
-                <a:ea typeface="Calibri" pitchFamily="34" charset="-122"/>
-                <a:cs typeface="Calibri" pitchFamily="34" charset="-120"/>
-              </a:rPr>
-              <a:t>La competencia se registra en IMaS.</a:t>
-            </a:r>
-            <a:endParaRPr lang="en-US" sz="750" dirty="0"/>
-          </a:p>
-        </p:txBody>
-      </p:sp>
-      <p:sp>
-        <p:nvSpPr>
-          <p:cNvPr id="97" name="Shape 94"/>
+              <a:t>Sin nombre ni ficha; en esta fase, los datos no salen del equipo, se analizan solo por grupo y se borran con un botón.</a:t>
+            </a:r>
+            <a:endParaRPr lang="en-US" sz="690" dirty="0"/>
+          </a:p>
+        </p:txBody>
+      </p:sp>
+      <p:sp>
+        <p:nvSpPr>
+          <p:cNvPr id="95" name="Shape 92"/>
           <p:cNvSpPr/>
           <p:nvPr/>
         </p:nvSpPr>
@@ -4232,7 +4154,7 @@
       </p:sp>
       <p:sp>
         <p:nvSpPr>
-          <p:cNvPr id="98" name="Text 95"/>
+          <p:cNvPr id="96" name="Text 93"/>
           <p:cNvSpPr txBox="1"/>
           <p:nvPr/>
         </p:nvSpPr>
@@ -4271,7 +4193,7 @@
       </p:sp>
       <p:sp>
         <p:nvSpPr>
-          <p:cNvPr id="99" name="Text 96"/>
+          <p:cNvPr id="97" name="Text 94"/>
           <p:cNvSpPr txBox="1"/>
           <p:nvPr/>
         </p:nvSpPr>
@@ -4310,7 +4232,7 @@
       </p:sp>
       <p:sp>
         <p:nvSpPr>
-          <p:cNvPr id="100" name="Text 97"/>
+          <p:cNvPr id="98" name="Text 95"/>
           <p:cNvSpPr txBox="1"/>
           <p:nvPr/>
         </p:nvSpPr>
@@ -4341,7 +4263,7 @@
                 <a:ea typeface="Calibri" pitchFamily="34" charset="-122"/>
                 <a:cs typeface="Calibri" pitchFamily="34" charset="-120"/>
               </a:rPr>
-              <a:t>Solo personal de confianza hasta el acuerdo de la CMCAP</a:t>
+              <a:t>Solo personal de confianza hasta el acuerdo de la CMCAP y la validación de Jurídico Laboral</a:t>
             </a:r>
             <a:endParaRPr lang="en-US" sz="850" dirty="0"/>
           </a:p>
@@ -4349,7 +4271,7 @@
       </p:sp>
       <p:sp>
         <p:nvSpPr>
-          <p:cNvPr id="101" name="Shape 98"/>
+          <p:cNvPr id="99" name="Shape 96"/>
           <p:cNvSpPr/>
           <p:nvPr/>
         </p:nvSpPr>
@@ -4369,7 +4291,7 @@
       </p:sp>
       <p:sp>
         <p:nvSpPr>
-          <p:cNvPr id="102" name="Shape 99"/>
+          <p:cNvPr id="100" name="Shape 97"/>
           <p:cNvSpPr/>
           <p:nvPr/>
         </p:nvSpPr>
@@ -4389,7 +4311,7 @@
       </p:sp>
       <p:sp>
         <p:nvSpPr>
-          <p:cNvPr id="103" name="Text 100"/>
+          <p:cNvPr id="101" name="Text 98"/>
           <p:cNvSpPr txBox="1"/>
           <p:nvPr/>
         </p:nvSpPr>
@@ -4428,7 +4350,7 @@
       </p:sp>
       <p:sp>
         <p:nvSpPr>
-          <p:cNvPr id="104" name="Text 101"/>
+          <p:cNvPr id="102" name="Text 99"/>
           <p:cNvSpPr txBox="1"/>
           <p:nvPr/>
         </p:nvSpPr>
@@ -4467,7 +4389,7 @@
       </p:sp>
       <p:sp>
         <p:nvSpPr>
-          <p:cNvPr id="105" name="Text 102"/>
+          <p:cNvPr id="103" name="Text 100"/>
           <p:cNvSpPr txBox="1"/>
           <p:nvPr/>
         </p:nvSpPr>
@@ -4506,7 +4428,7 @@
       </p:sp>
       <p:sp>
         <p:nvSpPr>
-          <p:cNvPr id="106" name="Shape 103"/>
+          <p:cNvPr id="104" name="Shape 101"/>
           <p:cNvSpPr/>
           <p:nvPr/>
         </p:nvSpPr>
@@ -4526,7 +4448,7 @@
       </p:sp>
       <p:sp>
         <p:nvSpPr>
-          <p:cNvPr id="107" name="Shape 104"/>
+          <p:cNvPr id="105" name="Shape 102"/>
           <p:cNvSpPr/>
           <p:nvPr/>
         </p:nvSpPr>
@@ -4546,7 +4468,7 @@
       </p:sp>
       <p:sp>
         <p:nvSpPr>
-          <p:cNvPr id="108" name="Text 105"/>
+          <p:cNvPr id="106" name="Text 103"/>
           <p:cNvSpPr txBox="1"/>
           <p:nvPr/>
         </p:nvSpPr>
@@ -4585,7 +4507,7 @@
       </p:sp>
       <p:sp>
         <p:nvSpPr>
-          <p:cNvPr id="109" name="Text 106"/>
+          <p:cNvPr id="107" name="Text 104"/>
           <p:cNvSpPr txBox="1"/>
           <p:nvPr/>
         </p:nvSpPr>
@@ -4624,7 +4546,7 @@
       </p:sp>
       <p:sp>
         <p:nvSpPr>
-          <p:cNvPr id="110" name="Text 107"/>
+          <p:cNvPr id="108" name="Text 105"/>
           <p:cNvSpPr txBox="1"/>
           <p:nvPr/>
         </p:nvSpPr>
@@ -4663,7 +4585,7 @@
       </p:sp>
       <p:sp>
         <p:nvSpPr>
-          <p:cNvPr id="111" name="Shape 108"/>
+          <p:cNvPr id="109" name="Shape 106"/>
           <p:cNvSpPr/>
           <p:nvPr/>
         </p:nvSpPr>
@@ -4683,7 +4605,7 @@
       </p:sp>
       <p:sp>
         <p:nvSpPr>
-          <p:cNvPr id="112" name="Shape 109"/>
+          <p:cNvPr id="110" name="Shape 107"/>
           <p:cNvSpPr/>
           <p:nvPr/>
         </p:nvSpPr>
@@ -4703,7 +4625,7 @@
       </p:sp>
       <p:sp>
         <p:nvSpPr>
-          <p:cNvPr id="113" name="Text 110"/>
+          <p:cNvPr id="111" name="Text 108"/>
           <p:cNvSpPr txBox="1"/>
           <p:nvPr/>
         </p:nvSpPr>
@@ -4742,7 +4664,7 @@
       </p:sp>
       <p:sp>
         <p:nvSpPr>
-          <p:cNvPr id="114" name="Text 111"/>
+          <p:cNvPr id="112" name="Text 109"/>
           <p:cNvSpPr txBox="1"/>
           <p:nvPr/>
         </p:nvSpPr>
@@ -4781,7 +4703,7 @@
       </p:sp>
       <p:sp>
         <p:nvSpPr>
-          <p:cNvPr id="115" name="Text 112"/>
+          <p:cNvPr id="113" name="Text 110"/>
           <p:cNvSpPr txBox="1"/>
           <p:nvPr/>
         </p:nvSpPr>
@@ -4820,7 +4742,7 @@
       </p:sp>
       <p:sp>
         <p:nvSpPr>
-          <p:cNvPr id="116" name="Shape 113"/>
+          <p:cNvPr id="114" name="Shape 111"/>
           <p:cNvSpPr/>
           <p:nvPr/>
         </p:nvSpPr>
@@ -4840,7 +4762,7 @@
       </p:sp>
       <p:sp>
         <p:nvSpPr>
-          <p:cNvPr id="117" name="Shape 114"/>
+          <p:cNvPr id="115" name="Shape 112"/>
           <p:cNvSpPr/>
           <p:nvPr/>
         </p:nvSpPr>
@@ -4860,7 +4782,7 @@
       </p:sp>
       <p:sp>
         <p:nvSpPr>
-          <p:cNvPr id="118" name="Text 115"/>
+          <p:cNvPr id="116" name="Text 113"/>
           <p:cNvSpPr txBox="1"/>
           <p:nvPr/>
         </p:nvSpPr>
@@ -4899,7 +4821,7 @@
       </p:sp>
       <p:sp>
         <p:nvSpPr>
-          <p:cNvPr id="119" name="Text 116"/>
+          <p:cNvPr id="117" name="Text 114"/>
           <p:cNvSpPr txBox="1"/>
           <p:nvPr/>
         </p:nvSpPr>
@@ -4938,7 +4860,7 @@
       </p:sp>
       <p:sp>
         <p:nvSpPr>
-          <p:cNvPr id="120" name="Text 117"/>
+          <p:cNvPr id="118" name="Text 115"/>
           <p:cNvSpPr txBox="1"/>
           <p:nvPr/>
         </p:nvSpPr>
@@ -4977,7 +4899,7 @@
       </p:sp>
       <p:sp>
         <p:nvSpPr>
-          <p:cNvPr id="121" name="Shape 118"/>
+          <p:cNvPr id="119" name="Shape 116"/>
           <p:cNvSpPr/>
           <p:nvPr/>
         </p:nvSpPr>
@@ -4997,7 +4919,7 @@
       </p:sp>
       <p:sp>
         <p:nvSpPr>
-          <p:cNvPr id="122" name="Shape 119"/>
+          <p:cNvPr id="120" name="Shape 117"/>
           <p:cNvSpPr/>
           <p:nvPr/>
         </p:nvSpPr>
@@ -5017,7 +4939,7 @@
       </p:sp>
       <p:sp>
         <p:nvSpPr>
-          <p:cNvPr id="123" name="Text 120"/>
+          <p:cNvPr id="121" name="Text 118"/>
           <p:cNvSpPr txBox="1"/>
           <p:nvPr/>
         </p:nvSpPr>
@@ -5056,7 +4978,7 @@
       </p:sp>
       <p:sp>
         <p:nvSpPr>
-          <p:cNvPr id="124" name="Text 121"/>
+          <p:cNvPr id="122" name="Text 119"/>
           <p:cNvSpPr txBox="1"/>
           <p:nvPr/>
         </p:nvSpPr>
@@ -5095,7 +5017,7 @@
       </p:sp>
       <p:sp>
         <p:nvSpPr>
-          <p:cNvPr id="125" name="Text 122"/>
+          <p:cNvPr id="123" name="Text 120"/>
           <p:cNvSpPr txBox="1"/>
           <p:nvPr/>
         </p:nvSpPr>
@@ -5134,7 +5056,7 @@
       </p:sp>
       <p:sp>
         <p:nvSpPr>
-          <p:cNvPr id="126" name="Shape 123"/>
+          <p:cNvPr id="124" name="Shape 121"/>
           <p:cNvSpPr/>
           <p:nvPr/>
         </p:nvSpPr>
@@ -5159,7 +5081,7 @@
       </p:sp>
       <p:sp>
         <p:nvSpPr>
-          <p:cNvPr id="127" name="Text 124"/>
+          <p:cNvPr id="125" name="Text 122"/>
           <p:cNvSpPr txBox="1"/>
           <p:nvPr/>
         </p:nvSpPr>
@@ -5198,7 +5120,7 @@
       </p:sp>
       <p:sp>
         <p:nvSpPr>
-          <p:cNvPr id="128" name="Text 125"/>
+          <p:cNvPr id="126" name="Text 123"/>
           <p:cNvSpPr txBox="1"/>
           <p:nvPr/>
         </p:nvSpPr>
@@ -5368,7 +5290,7 @@
       </p:sp>
       <p:pic>
         <p:nvPicPr>
-          <p:cNvPr id="129" name="Image 1" descr="/tmp/claude-0/-home-user-HR/2e49314e-011f-5c3a-b225-07e067b46c12/scratchpad/ammx/assets/gradient_band.png">    </p:cNvPr>
+          <p:cNvPr id="127" name="Image 1" descr="/tmp/claude-0/-home-user-HR/2e49314e-011f-5c3a-b225-07e067b46c12/scratchpad/ammx/assets/gradient_band.png">    </p:cNvPr>
           <p:cNvPicPr>
             <a:picLocks noChangeAspect="1"/>
           </p:cNvPicPr>
@@ -5391,7 +5313,7 @@
       </p:pic>
       <p:sp>
         <p:nvSpPr>
-          <p:cNvPr id="130" name="Text 126"/>
+          <p:cNvPr id="128" name="Text 124"/>
           <p:cNvSpPr txBox="1"/>
           <p:nvPr/>
         </p:nvSpPr>
@@ -5430,7 +5352,7 @@
       </p:sp>
       <p:sp>
         <p:nvSpPr>
-          <p:cNvPr id="131" name="Text 127"/>
+          <p:cNvPr id="129" name="Text 125"/>
           <p:cNvSpPr txBox="1"/>
           <p:nvPr/>
         </p:nvSpPr>
